--- a/decks/englang-p2/englang-p2_ch4_q4-perspectives.pptx
+++ b/decks/englang-p2/englang-p2_ch4_q4-perspectives.pptx
@@ -129,30 +129,30 @@
   <p:extLst>
     <p:ext uri="{521415D9-36F7-43E2-AB2F-B90AF26B5E84}">
       <p14:sectionLst xmlns:p14="http://schemas.microsoft.com/office/powerpoint/2010/main">
-        <p14:section name="Opening" id="{1a75f771-42a7-ec5e-5f0e-68a0bb397f18}">
+        <p14:section name="Opening" id="{36f0a5d7-5cef-4507-cbf0-93abc54d86e9}">
           <p14:sldIdLst>
             <p14:sldId id="256"/>
           </p14:sldIdLst>
         </p14:section>
-        <p14:section name="Gate" id="{7e7203fc-e04c-b56c-28c8-09a55680ee0a}">
+        <p14:section name="Gate" id="{8db3e36e-51d4-e1df-0d3e-a25d11f6a097}">
           <p14:sldIdLst>
             <p14:sldId id="257"/>
             <p14:sldId id="258"/>
           </p14:sldIdLst>
         </p14:section>
-        <p14:section name="Pre-teach" id="{1dff4496-e03b-6274-9b5f-236b5b494339}">
+        <p14:section name="Pre-teach" id="{52429e85-a85f-5e05-23f8-fbbc5af4ccfe}">
           <p14:sldIdLst>
             <p14:sldId id="259"/>
             <p14:sldId id="260"/>
           </p14:sldIdLst>
         </p14:section>
-        <p14:section name="Read-along" id="{2cc90ac7-e59f-78d6-74b5-65e8986b938c}">
+        <p14:section name="Read-along" id="{c47858c4-fc64-394b-86c2-b5d4b4b5e229}">
           <p14:sldIdLst>
             <p14:sldId id="261"/>
             <p14:sldId id="262"/>
           </p14:sldIdLst>
         </p14:section>
-        <p14:section name="Teach" id="{4f3199c9-0f93-f55b-fb06-0c1062b4ed44}">
+        <p14:section name="Teach" id="{993a5921-8a56-d9b7-c732-d3465b98a8f2}">
           <p14:sldIdLst>
             <p14:sldId id="263"/>
             <p14:sldId id="264"/>
@@ -164,7 +164,7 @@
             <p14:sldId id="270"/>
           </p14:sldIdLst>
         </p14:section>
-        <p14:section name="Routes" id="{2581356e-b145-2736-5be0-586583aad4ef}">
+        <p14:section name="Routes" id="{8dedc456-4113-741c-94b2-2570f954d784}">
           <p14:sldIdLst>
             <p14:sldId id="271"/>
             <p14:sldId id="272"/>
@@ -172,12 +172,12 @@
             <p14:sldId id="274"/>
           </p14:sldIdLst>
         </p14:section>
-        <p14:section name="Close" id="{89f4714b-41b5-4557-cda8-9ba1acd6de31}">
+        <p14:section name="Close" id="{52a6a170-6622-d658-5990-46213f003023}">
           <p14:sldIdLst>
             <p14:sldId id="275"/>
           </p14:sldIdLst>
         </p14:section>
-        <p14:section name="Answers" id="{3e9c1122-11f1-ceaa-06b9-cd41aba2d0da}">
+        <p14:section name="Answers" id="{45a14508-24d6-eb53-0c83-b3bfc1bc9a7c}">
           <p14:sldIdLst>
             <p14:sldId id="276"/>
             <p14:sldId id="277"/>
@@ -1607,7 +1607,7 @@
             <a:r>
               <a:rPr lang="en-US" dirty="0"/>
               <a:t>Do now — retrieval. Silent, no notes, no help: recall comes before any support. Give about four minutes.
-1. How many marks is Question 4 worth?  →  C   16
+1. How many marks is Question 4 worth?  →  D   16
 2. In Question 4 you compare the writers’ ideas and ___.  →  perspectives
 3. From 2026, what does the second bullet point of Question 4 ask you to do?  →  B   Comment on the methods the writers use
 Circulate: who gets 3/3 (Stretch route), 2/3 (Core), 0–1 (Support)? Use this to route pupils later in the lesson.</a:t>
@@ -1700,7 +1700,7 @@
               <a:rPr lang="en-US" dirty="0"/>
               <a:t>Exit ticket — individual, silent, on a slip or mini-whiteboard. Recall before help: no notes, no lanes, no hints. Collect before pupils leave.
 Question: How many marks is Question 4 worth?
-Answer: B   16. Question 4 is worth 16 marks and takes about 20 minutes.
+Answer: C   16. Question 4 is worth 16 marks and takes about 20 minutes.
 Source of this question: gate item 1 re-asked (options rotated) — this chapter has no third quick-check module.
 The ebook also holds task 3, "Question 4 practice answer", for homework or the next lesson's do now.
 Sort the slips: correct → ready to move on; incorrect → start next lesson in the pre-teach group, with the read-along and the Support lane. Same destination next time.</a:t>
@@ -1792,7 +1792,7 @@
             <a:r>
               <a:rPr lang="en-US" dirty="0"/>
               <a:t>Answers — task 1: Whose perspective?. Reveal the answer; pupils mark their own work in a different colour, then read the "why" together. Same destination for every lane, so one answer serves the whole class.
-Answer: B   Charlotte sees the Gardens as a triumph, while the modern writer comes to doubt what the park is for.
+Answer: A   Charlotte sees the Gardens as a triumph, while the modern writer comes to doubt what the park is for.
 Why: Charlotte finds the caged lion wonderful and calls the Gardens a triumph; the modern writer, happy at first, ends unsure what the visit has given anyone.
 Ask a Support pupil to explain one step, and a Stretch pupil to share their extension.</a:t>
             </a:r>
@@ -1974,7 +1974,7 @@
             <a:r>
               <a:rPr lang="en-US" dirty="0"/>
               <a:t>Answers — exit ticket: Exit ticket. Reveal the answer; pupils mark their own work in a different colour, then read the "why" together. Same destination for every lane, so one answer serves the whole class.
-Answer: B   16
+Answer: C   16
 Why: Question 4 is worth 16 marks and takes about 20 minutes.
 Ask a Support pupil to explain one step, and a Stretch pupil to share their extension.</a:t>
             </a:r>
@@ -2065,7 +2065,7 @@
             <a:r>
               <a:rPr lang="en-US" dirty="0"/>
               <a:t>Answers — pupils mark their own in a different colour, then hands up for 3/3, 2/3, 1/3.
-1. C   16. Question 4 is worth 16 marks and takes about 20 minutes.
+1. D   16. Question 4 is worth 16 marks and takes about 20 minutes.
 2. perspectives. Question 4 is a comparison of the writers’ ideas and perspectives.
 3. B   Comment on the methods the writers use. The second bullet now reads ‘comment on the methods the writers use’; the comparison is of ideas and perspectives.
 Say the route each score points to: 3/3 Stretch, 2/3 Core, 0–1 Support. Pupils may choose to move up.</a:t>
@@ -7309,7 +7309,7 @@
                 <a:ea typeface="Calibri" pitchFamily="34" charset="-122"/>
                 <a:cs typeface="Calibri" pitchFamily="34" charset="-120"/>
               </a:rPr>
-              <a:t>Both writers are delighted from the first line to the last.</a:t>
+              <a:t>Charlotte sees the Gardens as a triumph, while the modern writer comes to doubt what the park is for.</a:t>
             </a:r>
             <a:endParaRPr lang="en-US" sz="2600" dirty="0"/>
           </a:p>
@@ -7346,7 +7346,7 @@
                 <a:ea typeface="Calibri" pitchFamily="34" charset="-122"/>
                 <a:cs typeface="Calibri" pitchFamily="34" charset="-120"/>
               </a:rPr>
-              <a:t>Charlotte sees the Gardens as a triumph, while the modern writer comes to doubt what the park is for.</a:t>
+              <a:t>Both writers believe wild animals should never be kept for people to look at.</a:t>
             </a:r>
             <a:endParaRPr lang="en-US" sz="2600" dirty="0"/>
           </a:p>
@@ -7420,7 +7420,7 @@
                 <a:ea typeface="Calibri" pitchFamily="34" charset="-122"/>
                 <a:cs typeface="Calibri" pitchFamily="34" charset="-120"/>
               </a:rPr>
-              <a:t>Both writers believe wild animals should never be kept for people to look at.</a:t>
+              <a:t>Both writers are delighted from the first line to the last.</a:t>
             </a:r>
             <a:endParaRPr lang="en-US" sz="2600" dirty="0"/>
           </a:p>
@@ -10413,7 +10413,7 @@
                 <a:ea typeface="Calibri" pitchFamily="34" charset="-122"/>
                 <a:cs typeface="Calibri" pitchFamily="34" charset="-120"/>
               </a:rPr>
-              <a:t>8</a:t>
+              <a:t>12</a:t>
             </a:r>
             <a:endParaRPr lang="en-US" sz="2400" dirty="0"/>
           </a:p>
@@ -10450,7 +10450,7 @@
                 <a:ea typeface="Calibri" pitchFamily="34" charset="-122"/>
                 <a:cs typeface="Calibri" pitchFamily="34" charset="-120"/>
               </a:rPr>
-              <a:t>12</a:t>
+              <a:t>20</a:t>
             </a:r>
             <a:endParaRPr lang="en-US" sz="2400" dirty="0"/>
           </a:p>
@@ -10487,7 +10487,7 @@
                 <a:ea typeface="Calibri" pitchFamily="34" charset="-122"/>
                 <a:cs typeface="Calibri" pitchFamily="34" charset="-120"/>
               </a:rPr>
-              <a:t>16</a:t>
+              <a:t>8</a:t>
             </a:r>
             <a:endParaRPr lang="en-US" sz="2400" dirty="0"/>
           </a:p>
@@ -10524,7 +10524,7 @@
                 <a:ea typeface="Calibri" pitchFamily="34" charset="-122"/>
                 <a:cs typeface="Calibri" pitchFamily="34" charset="-120"/>
               </a:rPr>
-              <a:t>20</a:t>
+              <a:t>16</a:t>
             </a:r>
             <a:endParaRPr lang="en-US" sz="2400" dirty="0"/>
           </a:p>
@@ -10926,7 +10926,7 @@
                 <a:ea typeface="Calibri" pitchFamily="34" charset="-122"/>
                 <a:cs typeface="Calibri" pitchFamily="34" charset="-120"/>
               </a:rPr>
-              <a:t>Compare the methods the writers use</a:t>
+              <a:t>Summarise the two sources</a:t>
             </a:r>
             <a:endParaRPr lang="en-US" sz="1800" dirty="0"/>
           </a:p>
@@ -11000,7 +11000,7 @@
                 <a:ea typeface="Calibri" pitchFamily="34" charset="-122"/>
                 <a:cs typeface="Calibri" pitchFamily="34" charset="-120"/>
               </a:rPr>
-              <a:t>Summarise the two sources</a:t>
+              <a:t>Choose four true statements</a:t>
             </a:r>
             <a:endParaRPr lang="en-US" sz="1800" dirty="0"/>
           </a:p>
@@ -11037,7 +11037,7 @@
                 <a:ea typeface="Calibri" pitchFamily="34" charset="-122"/>
                 <a:cs typeface="Calibri" pitchFamily="34" charset="-120"/>
               </a:rPr>
-              <a:t>Choose four true statements</a:t>
+              <a:t>Compare the methods the writers use</a:t>
             </a:r>
             <a:endParaRPr lang="en-US" sz="1800" dirty="0"/>
           </a:p>
@@ -11413,7 +11413,7 @@
                 <a:ea typeface="Calibri" pitchFamily="34" charset="-122"/>
                 <a:cs typeface="Calibri" pitchFamily="34" charset="-120"/>
               </a:rPr>
-              <a:t>12</a:t>
+              <a:t>20</a:t>
             </a:r>
             <a:endParaRPr lang="en-US" sz="2400" dirty="0"/>
           </a:p>
@@ -11450,7 +11450,7 @@
                 <a:ea typeface="Calibri" pitchFamily="34" charset="-122"/>
                 <a:cs typeface="Calibri" pitchFamily="34" charset="-120"/>
               </a:rPr>
-              <a:t>16</a:t>
+              <a:t>8</a:t>
             </a:r>
             <a:endParaRPr lang="en-US" sz="2400" dirty="0"/>
           </a:p>
@@ -11487,7 +11487,7 @@
                 <a:ea typeface="Calibri" pitchFamily="34" charset="-122"/>
                 <a:cs typeface="Calibri" pitchFamily="34" charset="-120"/>
               </a:rPr>
-              <a:t>20</a:t>
+              <a:t>16</a:t>
             </a:r>
             <a:endParaRPr lang="en-US" sz="2400" dirty="0"/>
           </a:p>
@@ -11524,7 +11524,7 @@
                 <a:ea typeface="Calibri" pitchFamily="34" charset="-122"/>
                 <a:cs typeface="Calibri" pitchFamily="34" charset="-120"/>
               </a:rPr>
-              <a:t>8</a:t>
+              <a:t>12</a:t>
             </a:r>
             <a:endParaRPr lang="en-US" sz="2400" dirty="0"/>
           </a:p>
@@ -11929,7 +11929,7 @@
                 <a:ea typeface="Cambria" pitchFamily="34" charset="-122"/>
                 <a:cs typeface="Cambria" pitchFamily="34" charset="-120"/>
               </a:rPr>
-              <a:t>B   Charlotte sees the Gardens as a triumph, while the modern writer comes to doubt what the park is for.</a:t>
+              <a:t>A   Charlotte sees the Gardens as a triumph, while the modern writer comes to doubt what the park is for.</a:t>
             </a:r>
             <a:endParaRPr lang="en-US" sz="1800" dirty="0"/>
           </a:p>
@@ -13032,7 +13032,7 @@
                 <a:ea typeface="Cambria" pitchFamily="34" charset="-122"/>
                 <a:cs typeface="Cambria" pitchFamily="34" charset="-120"/>
               </a:rPr>
-              <a:t>B   16</a:t>
+              <a:t>C   16</a:t>
             </a:r>
             <a:endParaRPr lang="en-US" sz="1800" dirty="0"/>
           </a:p>
@@ -13553,7 +13553,7 @@
                 <a:ea typeface="Calibri" pitchFamily="34" charset="-122"/>
                 <a:cs typeface="Calibri" pitchFamily="34" charset="-120"/>
               </a:rPr>
-              <a:t>C   16</a:t>
+              <a:t>D   16</a:t>
             </a:r>
             <a:endParaRPr lang="en-US" sz="2200" dirty="0"/>
           </a:p>

--- a/decks/englang-p2/englang-p2_ch4_q4-perspectives.pptx
+++ b/decks/englang-p2/englang-p2_ch4_q4-perspectives.pptx
@@ -129,30 +129,30 @@
   <p:extLst>
     <p:ext uri="{521415D9-36F7-43E2-AB2F-B90AF26B5E84}">
       <p14:sectionLst xmlns:p14="http://schemas.microsoft.com/office/powerpoint/2010/main">
-        <p14:section name="Opening" id="{36f0a5d7-5cef-4507-cbf0-93abc54d86e9}">
+        <p14:section name="Opening" id="{a12b715b-1b00-1020-ec6b-ec9abaae2f8c}">
           <p14:sldIdLst>
             <p14:sldId id="256"/>
           </p14:sldIdLst>
         </p14:section>
-        <p14:section name="Gate" id="{8db3e36e-51d4-e1df-0d3e-a25d11f6a097}">
+        <p14:section name="Gate" id="{ccd89052-f568-792a-c57d-a400943657f7}">
           <p14:sldIdLst>
             <p14:sldId id="257"/>
             <p14:sldId id="258"/>
           </p14:sldIdLst>
         </p14:section>
-        <p14:section name="Pre-teach" id="{52429e85-a85f-5e05-23f8-fbbc5af4ccfe}">
+        <p14:section name="Pre-teach" id="{7a085013-d9ad-f650-0f97-4dea15a59470}">
           <p14:sldIdLst>
             <p14:sldId id="259"/>
             <p14:sldId id="260"/>
           </p14:sldIdLst>
         </p14:section>
-        <p14:section name="Read-along" id="{c47858c4-fc64-394b-86c2-b5d4b4b5e229}">
+        <p14:section name="Read-along" id="{78401f22-bd7d-0657-9c58-1172d3828548}">
           <p14:sldIdLst>
             <p14:sldId id="261"/>
             <p14:sldId id="262"/>
           </p14:sldIdLst>
         </p14:section>
-        <p14:section name="Teach" id="{993a5921-8a56-d9b7-c732-d3465b98a8f2}">
+        <p14:section name="Teach" id="{54af75d4-2eeb-cab6-6d36-97253d582029}">
           <p14:sldIdLst>
             <p14:sldId id="263"/>
             <p14:sldId id="264"/>
@@ -164,7 +164,7 @@
             <p14:sldId id="270"/>
           </p14:sldIdLst>
         </p14:section>
-        <p14:section name="Routes" id="{8dedc456-4113-741c-94b2-2570f954d784}">
+        <p14:section name="Routes" id="{3fde06ad-6a75-9e61-6b7c-0dc18f6bc1d2}">
           <p14:sldIdLst>
             <p14:sldId id="271"/>
             <p14:sldId id="272"/>
@@ -172,12 +172,12 @@
             <p14:sldId id="274"/>
           </p14:sldIdLst>
         </p14:section>
-        <p14:section name="Close" id="{52a6a170-6622-d658-5990-46213f003023}">
+        <p14:section name="Close" id="{8f11c25a-48d7-cfc9-d51d-5dd225970ac3}">
           <p14:sldIdLst>
             <p14:sldId id="275"/>
           </p14:sldIdLst>
         </p14:section>
-        <p14:section name="Answers" id="{45a14508-24d6-eb53-0c83-b3bfc1bc9a7c}">
+        <p14:section name="Answers" id="{867a9b88-f2ef-1c8a-7941-a9613cc50a40}">
           <p14:sldIdLst>
             <p14:sldId id="276"/>
             <p14:sldId id="277"/>
